--- a/fichiers/presentation/SlidesFili.pptx
+++ b/fichiers/presentation/SlidesFili.pptx
@@ -5,12 +5,15 @@
     <p:sldMasterId id="2147483797" r:id="rId1"/>
   </p:sldMasterIdLst>
   <p:notesMasterIdLst>
-    <p:notesMasterId r:id="rId5"/>
+    <p:notesMasterId r:id="rId8"/>
   </p:notesMasterIdLst>
   <p:sldIdLst>
     <p:sldId id="256" r:id="rId2"/>
     <p:sldId id="257" r:id="rId3"/>
     <p:sldId id="258" r:id="rId4"/>
+    <p:sldId id="269" r:id="rId5"/>
+    <p:sldId id="270" r:id="rId6"/>
+    <p:sldId id="275" r:id="rId7"/>
   </p:sldIdLst>
   <p:sldSz cx="12192000" cy="6858000"/>
   <p:notesSz cx="6858000" cy="9144000"/>
@@ -124,7 +127,11 @@
           </p14:sldIdLst>
         </p14:section>
         <p14:section name="BUT R&amp;T" id="{C1AA4397-45E6-441F-B375-64EA707F7C4F}">
-          <p14:sldIdLst/>
+          <p14:sldIdLst>
+            <p14:sldId id="269"/>
+            <p14:sldId id="270"/>
+            <p14:sldId id="275"/>
+          </p14:sldIdLst>
         </p14:section>
         <p14:section name="BTS CIEL" id="{D1ED1709-4A38-48E7-9862-26A9D8207EE1}">
           <p14:sldIdLst/>
@@ -238,7 +245,7 @@
           <a:p>
             <a:fld id="{1438A7C7-51D5-4CE9-848C-73CCDCB5AD2A}" type="datetimeFigureOut">
               <a:rPr lang="fr-FR" smtClean="0"/>
-              <a:t>06/06/2026</a:t>
+              <a:t>12/06/2026</a:t>
             </a:fld>
             <a:endParaRPr lang="fr-FR"/>
           </a:p>
@@ -505,6 +512,531 @@
 </p:notesMaster>
 </file>
 
+<file path=ppt/notesSlides/notesSlide1.xml><?xml version="1.0" encoding="utf-8"?>
+<p:notes xmlns:a="http://schemas.openxmlformats.org/drawingml/2006/main" xmlns:r="http://schemas.openxmlformats.org/officeDocument/2006/relationships" xmlns:p="http://schemas.openxmlformats.org/presentationml/2006/main">
+  <p:cSld>
+    <p:spTree>
+      <p:nvGrpSpPr>
+        <p:cNvPr id="1" name="">
+          <a:extLst>
+            <a:ext uri="{FF2B5EF4-FFF2-40B4-BE49-F238E27FC236}">
+              <a16:creationId xmlns:a16="http://schemas.microsoft.com/office/drawing/2014/main" id="{F193F637-99A3-E642-0945-42D13AE0F67F}"/>
+            </a:ext>
+          </a:extLst>
+        </p:cNvPr>
+        <p:cNvGrpSpPr/>
+        <p:nvPr/>
+      </p:nvGrpSpPr>
+      <p:grpSpPr>
+        <a:xfrm>
+          <a:off x="0" y="0"/>
+          <a:ext cx="0" cy="0"/>
+          <a:chOff x="0" y="0"/>
+          <a:chExt cx="0" cy="0"/>
+        </a:xfrm>
+      </p:grpSpPr>
+      <p:sp>
+        <p:nvSpPr>
+          <p:cNvPr id="2" name="Espace réservé de l'image des diapositives 1">
+            <a:extLst>
+              <a:ext uri="{FF2B5EF4-FFF2-40B4-BE49-F238E27FC236}">
+                <a16:creationId xmlns:a16="http://schemas.microsoft.com/office/drawing/2014/main" id="{1F5E074F-4838-BF10-91A0-E403FD68E2BD}"/>
+              </a:ext>
+            </a:extLst>
+          </p:cNvPr>
+          <p:cNvSpPr>
+            <a:spLocks noGrp="1" noRot="1" noChangeAspect="1"/>
+          </p:cNvSpPr>
+          <p:nvPr>
+            <p:ph type="sldImg"/>
+          </p:nvPr>
+        </p:nvSpPr>
+        <p:spPr/>
+      </p:sp>
+      <p:sp>
+        <p:nvSpPr>
+          <p:cNvPr id="3" name="Espace réservé des notes 2">
+            <a:extLst>
+              <a:ext uri="{FF2B5EF4-FFF2-40B4-BE49-F238E27FC236}">
+                <a16:creationId xmlns:a16="http://schemas.microsoft.com/office/drawing/2014/main" id="{ACA3FD37-3DE3-CF43-5EEF-6CD944FB48D0}"/>
+              </a:ext>
+            </a:extLst>
+          </p:cNvPr>
+          <p:cNvSpPr>
+            <a:spLocks noGrp="1"/>
+          </p:cNvSpPr>
+          <p:nvPr>
+            <p:ph type="body" idx="1"/>
+          </p:nvPr>
+        </p:nvSpPr>
+        <p:spPr/>
+        <p:txBody>
+          <a:bodyPr/>
+          <a:lstStyle/>
+          <a:p>
+            <a:r>
+              <a:rPr lang="fr-FR" dirty="0"/>
+              <a:t>Chiffres d’effectif pour l’IUT </a:t>
+            </a:r>
+            <a:r>
+              <a:rPr lang="fr-FR" dirty="0" err="1"/>
+              <a:t>blagnac</a:t>
+            </a:r>
+            <a:endParaRPr lang="fr-FR" dirty="0"/>
+          </a:p>
+          <a:p>
+            <a:r>
+              <a:rPr lang="fr-FR" dirty="0"/>
+              <a:t>Chiffres de la formation sur le site des </a:t>
+            </a:r>
+            <a:r>
+              <a:rPr lang="fr-FR" dirty="0" err="1"/>
+              <a:t>iuts</a:t>
+            </a:r>
+            <a:r>
+              <a:rPr lang="fr-FR" dirty="0"/>
+              <a:t> de R&amp;T par une enquête interne de l’ACD R&amp;T 2022</a:t>
+            </a:r>
+          </a:p>
+          <a:p>
+            <a:r>
+              <a:rPr lang="fr-FR" dirty="0"/>
+              <a:t>(Assemblées des Chefs de Départements)</a:t>
+            </a:r>
+          </a:p>
+          <a:p>
+            <a:endParaRPr lang="fr-FR" dirty="0"/>
+          </a:p>
+          <a:p>
+            <a:r>
+              <a:rPr lang="fr-FR" dirty="0"/>
+              <a:t>Réorientation IUT1 </a:t>
+            </a:r>
+            <a:r>
+              <a:rPr lang="fr-FR" dirty="0" err="1"/>
+              <a:t>grenobles</a:t>
+            </a:r>
+            <a:endParaRPr lang="fr-FR" dirty="0"/>
+          </a:p>
+          <a:p>
+            <a:r>
+              <a:rPr lang="fr-FR" dirty="0"/>
+              <a:t>10 % pour les bacs techno</a:t>
+            </a:r>
+          </a:p>
+          <a:p>
+            <a:r>
+              <a:rPr lang="fr-FR" dirty="0"/>
+              <a:t>20 % pour les bacs </a:t>
+            </a:r>
+            <a:r>
+              <a:rPr lang="fr-FR" dirty="0" err="1"/>
+              <a:t>génraux</a:t>
+            </a:r>
+            <a:endParaRPr lang="fr-FR" dirty="0"/>
+          </a:p>
+          <a:p>
+            <a:endParaRPr lang="fr-FR" dirty="0"/>
+          </a:p>
+          <a:p>
+            <a:r>
+              <a:rPr lang="fr-FR" dirty="0" err="1"/>
+              <a:t>Récommandées</a:t>
+            </a:r>
+            <a:r>
+              <a:rPr lang="fr-FR" dirty="0"/>
+              <a:t> :</a:t>
+            </a:r>
+          </a:p>
+          <a:p>
+            <a:r>
+              <a:rPr lang="fr-FR" dirty="0"/>
+              <a:t>Bac gé avec :</a:t>
+            </a:r>
+          </a:p>
+          <a:p>
+            <a:pPr marL="171450" indent="-171450">
+              <a:buFontTx/>
+              <a:buChar char="-"/>
+            </a:pPr>
+            <a:r>
+              <a:rPr lang="fr-FR" dirty="0"/>
+              <a:t>Mathématiques</a:t>
+            </a:r>
+          </a:p>
+          <a:p>
+            <a:pPr marL="171450" indent="-171450">
+              <a:buFontTx/>
+              <a:buChar char="-"/>
+            </a:pPr>
+            <a:r>
+              <a:rPr lang="fr-FR" dirty="0"/>
+              <a:t>NSI</a:t>
+            </a:r>
+          </a:p>
+          <a:p>
+            <a:pPr marL="171450" indent="-171450">
+              <a:buFontTx/>
+              <a:buChar char="-"/>
+            </a:pPr>
+            <a:r>
+              <a:rPr lang="fr-FR" dirty="0"/>
+              <a:t>PC</a:t>
+            </a:r>
+          </a:p>
+          <a:p>
+            <a:pPr marL="171450" indent="-171450">
+              <a:buFontTx/>
+              <a:buChar char="-"/>
+            </a:pPr>
+            <a:r>
+              <a:rPr lang="fr-FR" dirty="0"/>
+              <a:t>SI</a:t>
+            </a:r>
+          </a:p>
+          <a:p>
+            <a:pPr marL="0" indent="0">
+              <a:buFontTx/>
+              <a:buNone/>
+            </a:pPr>
+            <a:r>
+              <a:rPr lang="fr-FR" dirty="0"/>
+              <a:t>Bac STI2D</a:t>
+            </a:r>
+          </a:p>
+          <a:p>
+            <a:pPr marL="0" indent="0">
+              <a:buFontTx/>
+              <a:buNone/>
+            </a:pPr>
+            <a:endParaRPr lang="fr-FR" dirty="0"/>
+          </a:p>
+        </p:txBody>
+      </p:sp>
+      <p:sp>
+        <p:nvSpPr>
+          <p:cNvPr id="4" name="Espace réservé du numéro de diapositive 3">
+            <a:extLst>
+              <a:ext uri="{FF2B5EF4-FFF2-40B4-BE49-F238E27FC236}">
+                <a16:creationId xmlns:a16="http://schemas.microsoft.com/office/drawing/2014/main" id="{1D9F53F3-0B52-B898-24FD-6FB55C69F982}"/>
+              </a:ext>
+            </a:extLst>
+          </p:cNvPr>
+          <p:cNvSpPr>
+            <a:spLocks noGrp="1"/>
+          </p:cNvSpPr>
+          <p:nvPr>
+            <p:ph type="sldNum" sz="quarter" idx="5"/>
+          </p:nvPr>
+        </p:nvSpPr>
+        <p:spPr/>
+        <p:txBody>
+          <a:bodyPr/>
+          <a:lstStyle/>
+          <a:p>
+            <a:fld id="{0FBCDEAB-4DA5-41C5-8AE0-9362D38F26CD}" type="slidenum">
+              <a:rPr lang="fr-FR" smtClean="0"/>
+              <a:t>4</a:t>
+            </a:fld>
+            <a:endParaRPr lang="fr-FR"/>
+          </a:p>
+        </p:txBody>
+      </p:sp>
+    </p:spTree>
+    <p:extLst>
+      <p:ext uri="{BB962C8B-B14F-4D97-AF65-F5344CB8AC3E}">
+        <p14:creationId xmlns:p14="http://schemas.microsoft.com/office/powerpoint/2010/main" val="510707851"/>
+      </p:ext>
+    </p:extLst>
+  </p:cSld>
+  <p:clrMapOvr>
+    <a:masterClrMapping/>
+  </p:clrMapOvr>
+</p:notes>
+</file>
+
+<file path=ppt/notesSlides/notesSlide2.xml><?xml version="1.0" encoding="utf-8"?>
+<p:notes xmlns:a="http://schemas.openxmlformats.org/drawingml/2006/main" xmlns:r="http://schemas.openxmlformats.org/officeDocument/2006/relationships" xmlns:p="http://schemas.openxmlformats.org/presentationml/2006/main">
+  <p:cSld>
+    <p:spTree>
+      <p:nvGrpSpPr>
+        <p:cNvPr id="1" name="">
+          <a:extLst>
+            <a:ext uri="{FF2B5EF4-FFF2-40B4-BE49-F238E27FC236}">
+              <a16:creationId xmlns:a16="http://schemas.microsoft.com/office/drawing/2014/main" id="{125AFA54-31E2-0992-21BF-C570102F8CB3}"/>
+            </a:ext>
+          </a:extLst>
+        </p:cNvPr>
+        <p:cNvGrpSpPr/>
+        <p:nvPr/>
+      </p:nvGrpSpPr>
+      <p:grpSpPr>
+        <a:xfrm>
+          <a:off x="0" y="0"/>
+          <a:ext cx="0" cy="0"/>
+          <a:chOff x="0" y="0"/>
+          <a:chExt cx="0" cy="0"/>
+        </a:xfrm>
+      </p:grpSpPr>
+      <p:sp>
+        <p:nvSpPr>
+          <p:cNvPr id="2" name="Espace réservé de l'image des diapositives 1">
+            <a:extLst>
+              <a:ext uri="{FF2B5EF4-FFF2-40B4-BE49-F238E27FC236}">
+                <a16:creationId xmlns:a16="http://schemas.microsoft.com/office/drawing/2014/main" id="{64594C7B-B3F0-FE79-E583-851D97B1DED3}"/>
+              </a:ext>
+            </a:extLst>
+          </p:cNvPr>
+          <p:cNvSpPr>
+            <a:spLocks noGrp="1" noRot="1" noChangeAspect="1"/>
+          </p:cNvSpPr>
+          <p:nvPr>
+            <p:ph type="sldImg"/>
+          </p:nvPr>
+        </p:nvSpPr>
+        <p:spPr/>
+      </p:sp>
+      <p:sp>
+        <p:nvSpPr>
+          <p:cNvPr id="3" name="Espace réservé des notes 2">
+            <a:extLst>
+              <a:ext uri="{FF2B5EF4-FFF2-40B4-BE49-F238E27FC236}">
+                <a16:creationId xmlns:a16="http://schemas.microsoft.com/office/drawing/2014/main" id="{8C9C114B-4EF9-2A2D-8878-392119D6B484}"/>
+              </a:ext>
+            </a:extLst>
+          </p:cNvPr>
+          <p:cNvSpPr>
+            <a:spLocks noGrp="1"/>
+          </p:cNvSpPr>
+          <p:nvPr>
+            <p:ph type="body" idx="1"/>
+          </p:nvPr>
+        </p:nvSpPr>
+        <p:spPr/>
+        <p:txBody>
+          <a:bodyPr/>
+          <a:lstStyle/>
+          <a:p>
+            <a:pPr marL="171450" indent="-171450">
+              <a:buFontTx/>
+              <a:buChar char="-"/>
+            </a:pPr>
+            <a:r>
+              <a:rPr lang="fr-FR" dirty="0"/>
+              <a:t>10 en 2A</a:t>
+            </a:r>
+          </a:p>
+          <a:p>
+            <a:pPr marL="171450" indent="-171450">
+              <a:buFontTx/>
+              <a:buChar char="-"/>
+            </a:pPr>
+            <a:r>
+              <a:rPr lang="fr-FR" dirty="0"/>
+              <a:t>16 en 3A</a:t>
+            </a:r>
+          </a:p>
+          <a:p>
+            <a:pPr marL="171450" indent="-171450">
+              <a:buFontTx/>
+              <a:buChar char="-"/>
+            </a:pPr>
+            <a:r>
+              <a:rPr lang="fr-FR" dirty="0"/>
+              <a:t>Pour </a:t>
+            </a:r>
+          </a:p>
+          <a:p>
+            <a:pPr marL="171450" indent="-171450">
+              <a:buFontTx/>
+              <a:buChar char="-"/>
+            </a:pPr>
+            <a:endParaRPr lang="fr-FR" dirty="0"/>
+          </a:p>
+          <a:p>
+            <a:pPr marL="171450" indent="-171450">
+              <a:buFontTx/>
+              <a:buChar char="-"/>
+            </a:pPr>
+            <a:endParaRPr lang="fr-FR" dirty="0"/>
+          </a:p>
+          <a:p>
+            <a:pPr marL="171450" indent="-171450">
+              <a:buFontTx/>
+              <a:buChar char="-"/>
+            </a:pPr>
+            <a:r>
+              <a:rPr lang="fr-FR" dirty="0"/>
+              <a:t>des semaines d’une 30</a:t>
+            </a:r>
+            <a:r>
+              <a:rPr lang="fr-FR" baseline="30000" dirty="0"/>
+              <a:t>aine</a:t>
+            </a:r>
+            <a:r>
+              <a:rPr lang="fr-FR" dirty="0"/>
+              <a:t> d’heures.</a:t>
+            </a:r>
+          </a:p>
+        </p:txBody>
+      </p:sp>
+      <p:sp>
+        <p:nvSpPr>
+          <p:cNvPr id="4" name="Espace réservé du numéro de diapositive 3">
+            <a:extLst>
+              <a:ext uri="{FF2B5EF4-FFF2-40B4-BE49-F238E27FC236}">
+                <a16:creationId xmlns:a16="http://schemas.microsoft.com/office/drawing/2014/main" id="{AA4A5BBB-C93A-0D36-D566-C03169FCA825}"/>
+              </a:ext>
+            </a:extLst>
+          </p:cNvPr>
+          <p:cNvSpPr>
+            <a:spLocks noGrp="1"/>
+          </p:cNvSpPr>
+          <p:nvPr>
+            <p:ph type="sldNum" sz="quarter" idx="5"/>
+          </p:nvPr>
+        </p:nvSpPr>
+        <p:spPr/>
+        <p:txBody>
+          <a:bodyPr/>
+          <a:lstStyle/>
+          <a:p>
+            <a:fld id="{0FBCDEAB-4DA5-41C5-8AE0-9362D38F26CD}" type="slidenum">
+              <a:rPr lang="fr-FR" smtClean="0"/>
+              <a:t>5</a:t>
+            </a:fld>
+            <a:endParaRPr lang="fr-FR"/>
+          </a:p>
+        </p:txBody>
+      </p:sp>
+    </p:spTree>
+    <p:extLst>
+      <p:ext uri="{BB962C8B-B14F-4D97-AF65-F5344CB8AC3E}">
+        <p14:creationId xmlns:p14="http://schemas.microsoft.com/office/powerpoint/2010/main" val="2682967386"/>
+      </p:ext>
+    </p:extLst>
+  </p:cSld>
+  <p:clrMapOvr>
+    <a:masterClrMapping/>
+  </p:clrMapOvr>
+</p:notes>
+</file>
+
+<file path=ppt/notesSlides/notesSlide3.xml><?xml version="1.0" encoding="utf-8"?>
+<p:notes xmlns:a="http://schemas.openxmlformats.org/drawingml/2006/main" xmlns:r="http://schemas.openxmlformats.org/officeDocument/2006/relationships" xmlns:p="http://schemas.openxmlformats.org/presentationml/2006/main">
+  <p:cSld>
+    <p:spTree>
+      <p:nvGrpSpPr>
+        <p:cNvPr id="1" name="">
+          <a:extLst>
+            <a:ext uri="{FF2B5EF4-FFF2-40B4-BE49-F238E27FC236}">
+              <a16:creationId xmlns:a16="http://schemas.microsoft.com/office/drawing/2014/main" id="{EC18A807-BA04-439C-C1C9-3169DDDF8BEE}"/>
+            </a:ext>
+          </a:extLst>
+        </p:cNvPr>
+        <p:cNvGrpSpPr/>
+        <p:nvPr/>
+      </p:nvGrpSpPr>
+      <p:grpSpPr>
+        <a:xfrm>
+          <a:off x="0" y="0"/>
+          <a:ext cx="0" cy="0"/>
+          <a:chOff x="0" y="0"/>
+          <a:chExt cx="0" cy="0"/>
+        </a:xfrm>
+      </p:grpSpPr>
+      <p:sp>
+        <p:nvSpPr>
+          <p:cNvPr id="2" name="Espace réservé de l'image des diapositives 1">
+            <a:extLst>
+              <a:ext uri="{FF2B5EF4-FFF2-40B4-BE49-F238E27FC236}">
+                <a16:creationId xmlns:a16="http://schemas.microsoft.com/office/drawing/2014/main" id="{DD00ABAC-48AD-204C-9F72-27B6CC52C871}"/>
+              </a:ext>
+            </a:extLst>
+          </p:cNvPr>
+          <p:cNvSpPr>
+            <a:spLocks noGrp="1" noRot="1" noChangeAspect="1"/>
+          </p:cNvSpPr>
+          <p:nvPr>
+            <p:ph type="sldImg"/>
+          </p:nvPr>
+        </p:nvSpPr>
+        <p:spPr/>
+      </p:sp>
+      <p:sp>
+        <p:nvSpPr>
+          <p:cNvPr id="3" name="Espace réservé des notes 2">
+            <a:extLst>
+              <a:ext uri="{FF2B5EF4-FFF2-40B4-BE49-F238E27FC236}">
+                <a16:creationId xmlns:a16="http://schemas.microsoft.com/office/drawing/2014/main" id="{A1192895-75B6-F9AC-AC90-34588C9C784E}"/>
+              </a:ext>
+            </a:extLst>
+          </p:cNvPr>
+          <p:cNvSpPr>
+            <a:spLocks noGrp="1"/>
+          </p:cNvSpPr>
+          <p:nvPr>
+            <p:ph type="body" idx="1"/>
+          </p:nvPr>
+        </p:nvSpPr>
+        <p:spPr/>
+        <p:txBody>
+          <a:bodyPr/>
+          <a:lstStyle/>
+          <a:p>
+            <a:pPr marL="171450" indent="-171450">
+              <a:buFontTx/>
+              <a:buChar char="-"/>
+            </a:pPr>
+            <a:r>
+              <a:rPr lang="fr-FR" dirty="0"/>
+              <a:t>Résonne en milieu professionnel</a:t>
+            </a:r>
+          </a:p>
+        </p:txBody>
+      </p:sp>
+      <p:sp>
+        <p:nvSpPr>
+          <p:cNvPr id="4" name="Espace réservé du numéro de diapositive 3">
+            <a:extLst>
+              <a:ext uri="{FF2B5EF4-FFF2-40B4-BE49-F238E27FC236}">
+                <a16:creationId xmlns:a16="http://schemas.microsoft.com/office/drawing/2014/main" id="{20C8D049-D405-F69D-5C3D-2015BAFC24E4}"/>
+              </a:ext>
+            </a:extLst>
+          </p:cNvPr>
+          <p:cNvSpPr>
+            <a:spLocks noGrp="1"/>
+          </p:cNvSpPr>
+          <p:nvPr>
+            <p:ph type="sldNum" sz="quarter" idx="5"/>
+          </p:nvPr>
+        </p:nvSpPr>
+        <p:spPr/>
+        <p:txBody>
+          <a:bodyPr/>
+          <a:lstStyle/>
+          <a:p>
+            <a:fld id="{0FBCDEAB-4DA5-41C5-8AE0-9362D38F26CD}" type="slidenum">
+              <a:rPr lang="fr-FR" smtClean="0"/>
+              <a:t>6</a:t>
+            </a:fld>
+            <a:endParaRPr lang="fr-FR"/>
+          </a:p>
+        </p:txBody>
+      </p:sp>
+    </p:spTree>
+    <p:extLst>
+      <p:ext uri="{BB962C8B-B14F-4D97-AF65-F5344CB8AC3E}">
+        <p14:creationId xmlns:p14="http://schemas.microsoft.com/office/powerpoint/2010/main" val="3017443304"/>
+      </p:ext>
+    </p:extLst>
+  </p:cSld>
+  <p:clrMapOvr>
+    <a:masterClrMapping/>
+  </p:clrMapOvr>
+</p:notes>
+</file>
+
 <file path=ppt/slideLayouts/slideLayout1.xml><?xml version="1.0" encoding="utf-8"?>
 <p:sldLayout xmlns:a="http://schemas.openxmlformats.org/drawingml/2006/main" xmlns:r="http://schemas.openxmlformats.org/officeDocument/2006/relationships" xmlns:p="http://schemas.openxmlformats.org/presentationml/2006/main" showMasterSp="0" type="title" preserve="1">
   <p:cSld name="Diapositive de titre">
@@ -674,7 +1206,7 @@
           <a:p>
             <a:fld id="{25BF4BE5-493C-4950-8611-4B73EBA124A3}" type="datetime1">
               <a:rPr lang="fr-FR" smtClean="0"/>
-              <a:t>06/06/2026</a:t>
+              <a:t>12/06/2026</a:t>
             </a:fld>
             <a:endParaRPr lang="fr-FR"/>
           </a:p>
@@ -1028,7 +1560,7 @@
           <a:p>
             <a:fld id="{7440509C-B4B3-4DBB-BCC9-40D57FCA4C66}" type="datetime1">
               <a:rPr lang="fr-FR" smtClean="0"/>
-              <a:t>06/06/2026</a:t>
+              <a:t>12/06/2026</a:t>
             </a:fld>
             <a:endParaRPr lang="fr-FR"/>
           </a:p>
@@ -1208,7 +1740,7 @@
           <a:p>
             <a:fld id="{F751CFBF-E380-4D91-9539-BDFDF7AF5C45}" type="datetime1">
               <a:rPr lang="fr-FR" smtClean="0"/>
-              <a:t>06/06/2026</a:t>
+              <a:t>12/06/2026</a:t>
             </a:fld>
             <a:endParaRPr lang="fr-FR"/>
           </a:p>
@@ -1378,7 +1910,7 @@
           <a:p>
             <a:fld id="{D2B74F8F-65AC-4766-A2F7-69AD9EC8EDDE}" type="datetime1">
               <a:rPr lang="fr-FR" smtClean="0"/>
-              <a:t>06/06/2026</a:t>
+              <a:t>12/06/2026</a:t>
             </a:fld>
             <a:endParaRPr lang="fr-FR"/>
           </a:p>
@@ -1655,7 +2187,7 @@
           <a:p>
             <a:fld id="{B4EF0BDA-B3DF-4C30-B725-2619B0E62ACD}" type="datetime1">
               <a:rPr lang="fr-FR" smtClean="0"/>
-              <a:t>06/06/2026</a:t>
+              <a:t>12/06/2026</a:t>
             </a:fld>
             <a:endParaRPr lang="fr-FR"/>
           </a:p>
@@ -2066,7 +2598,7 @@
           <a:p>
             <a:fld id="{2BB7BCF4-2F57-44BE-86E1-4D2E12B5FC6A}" type="datetime1">
               <a:rPr lang="fr-FR" smtClean="0"/>
-              <a:t>06/06/2026</a:t>
+              <a:t>12/06/2026</a:t>
             </a:fld>
             <a:endParaRPr lang="fr-FR"/>
           </a:p>
@@ -2543,7 +3075,7 @@
           <a:p>
             <a:fld id="{6321D020-EA2F-4E08-9F19-25238FB1646F}" type="datetime1">
               <a:rPr lang="fr-FR" smtClean="0"/>
-              <a:t>06/06/2026</a:t>
+              <a:t>12/06/2026</a:t>
             </a:fld>
             <a:endParaRPr lang="fr-FR"/>
           </a:p>
@@ -2661,7 +3193,7 @@
           <a:p>
             <a:fld id="{13019C80-4ECC-4A86-ACB8-43004AF15481}" type="datetime1">
               <a:rPr lang="fr-FR" smtClean="0"/>
-              <a:t>06/06/2026</a:t>
+              <a:t>12/06/2026</a:t>
             </a:fld>
             <a:endParaRPr lang="fr-FR"/>
           </a:p>
@@ -2756,7 +3288,7 @@
           <a:p>
             <a:fld id="{D5B1220C-94C3-4D23-98DD-B536DE4A6F2C}" type="datetime1">
               <a:rPr lang="fr-FR" smtClean="0"/>
-              <a:t>06/06/2026</a:t>
+              <a:t>12/06/2026</a:t>
             </a:fld>
             <a:endParaRPr lang="fr-FR"/>
           </a:p>
@@ -3102,7 +3634,7 @@
           <a:p>
             <a:fld id="{D77193F2-5089-4D6D-B951-141B92746967}" type="datetime1">
               <a:rPr lang="fr-FR" smtClean="0"/>
-              <a:t>06/06/2026</a:t>
+              <a:t>12/06/2026</a:t>
             </a:fld>
             <a:endParaRPr lang="fr-FR"/>
           </a:p>
@@ -3500,7 +4032,7 @@
           <a:p>
             <a:fld id="{2155EEFE-CE4B-45B5-811F-7C771B7BD159}" type="datetime1">
               <a:rPr lang="fr-FR" smtClean="0"/>
-              <a:t>06/06/2026</a:t>
+              <a:t>12/06/2026</a:t>
             </a:fld>
             <a:endParaRPr lang="fr-FR"/>
           </a:p>
@@ -3788,7 +4320,7 @@
           <a:p>
             <a:fld id="{8865F967-DFD5-47C5-B34E-026F86C5401C}" type="datetime1">
               <a:rPr lang="fr-FR" smtClean="0"/>
-              <a:t>06/06/2026</a:t>
+              <a:t>12/06/2026</a:t>
             </a:fld>
             <a:endParaRPr lang="fr-FR"/>
           </a:p>
@@ -4476,42 +5008,6 @@
           </a:p>
         </p:txBody>
       </p:sp>
-      <p:sp>
-        <p:nvSpPr>
-          <p:cNvPr id="7" name="ZoneTexte 6">
-            <a:extLst>
-              <a:ext uri="{FF2B5EF4-FFF2-40B4-BE49-F238E27FC236}">
-                <a16:creationId xmlns:a16="http://schemas.microsoft.com/office/drawing/2014/main" id="{F88EB477-F4AE-B5AC-DF2F-6EF0079BD8D7}"/>
-              </a:ext>
-            </a:extLst>
-          </p:cNvPr>
-          <p:cNvSpPr txBox="1"/>
-          <p:nvPr/>
-        </p:nvSpPr>
-        <p:spPr>
-          <a:xfrm>
-            <a:off x="3048000" y="3297674"/>
-            <a:ext cx="6096000" cy="369332"/>
-          </a:xfrm>
-          <a:prstGeom prst="rect">
-            <a:avLst/>
-          </a:prstGeom>
-          <a:noFill/>
-        </p:spPr>
-        <p:txBody>
-          <a:bodyPr wrap="square">
-            <a:spAutoFit/>
-          </a:bodyPr>
-          <a:lstStyle/>
-          <a:p>
-            <a:r>
-              <a:rPr lang="fr-FR" dirty="0" err="1"/>
-              <a:t>SlidesFili</a:t>
-            </a:r>
-            <a:endParaRPr lang="fr-FR" dirty="0"/>
-          </a:p>
-        </p:txBody>
-      </p:sp>
     </p:spTree>
     <p:extLst>
       <p:ext uri="{BB962C8B-B14F-4D97-AF65-F5344CB8AC3E}">
@@ -4737,6 +5233,985 @@
     <p:extLst>
       <p:ext uri="{BB962C8B-B14F-4D97-AF65-F5344CB8AC3E}">
         <p14:creationId xmlns:p14="http://schemas.microsoft.com/office/powerpoint/2010/main" val="2030705671"/>
+      </p:ext>
+    </p:extLst>
+  </p:cSld>
+  <p:clrMapOvr>
+    <a:masterClrMapping/>
+  </p:clrMapOvr>
+</p:sld>
+</file>
+
+<file path=ppt/slides/slide4.xml><?xml version="1.0" encoding="utf-8"?>
+<p:sld xmlns:a="http://schemas.openxmlformats.org/drawingml/2006/main" xmlns:r="http://schemas.openxmlformats.org/officeDocument/2006/relationships" xmlns:p="http://schemas.openxmlformats.org/presentationml/2006/main">
+  <p:cSld>
+    <p:spTree>
+      <p:nvGrpSpPr>
+        <p:cNvPr id="1" name="">
+          <a:extLst>
+            <a:ext uri="{FF2B5EF4-FFF2-40B4-BE49-F238E27FC236}">
+              <a16:creationId xmlns:a16="http://schemas.microsoft.com/office/drawing/2014/main" id="{F2A158DB-6A5D-6EAF-62CA-93B3FDB1A3B4}"/>
+            </a:ext>
+          </a:extLst>
+        </p:cNvPr>
+        <p:cNvGrpSpPr/>
+        <p:nvPr/>
+      </p:nvGrpSpPr>
+      <p:grpSpPr>
+        <a:xfrm>
+          <a:off x="0" y="0"/>
+          <a:ext cx="0" cy="0"/>
+          <a:chOff x="0" y="0"/>
+          <a:chExt cx="0" cy="0"/>
+        </a:xfrm>
+      </p:grpSpPr>
+      <p:sp>
+        <p:nvSpPr>
+          <p:cNvPr id="2" name="Titre 1">
+            <a:extLst>
+              <a:ext uri="{FF2B5EF4-FFF2-40B4-BE49-F238E27FC236}">
+                <a16:creationId xmlns:a16="http://schemas.microsoft.com/office/drawing/2014/main" id="{A529A41B-ACD6-A933-E495-48E1AB09E0E2}"/>
+              </a:ext>
+            </a:extLst>
+          </p:cNvPr>
+          <p:cNvSpPr>
+            <a:spLocks noGrp="1"/>
+          </p:cNvSpPr>
+          <p:nvPr>
+            <p:ph type="title"/>
+          </p:nvPr>
+        </p:nvSpPr>
+        <p:spPr/>
+        <p:txBody>
+          <a:bodyPr/>
+          <a:lstStyle/>
+          <a:p>
+            <a:r>
+              <a:rPr lang="fr-FR" dirty="0"/>
+              <a:t>Contexte</a:t>
+            </a:r>
+          </a:p>
+        </p:txBody>
+      </p:sp>
+      <p:sp>
+        <p:nvSpPr>
+          <p:cNvPr id="3" name="Espace réservé du contenu 2">
+            <a:extLst>
+              <a:ext uri="{FF2B5EF4-FFF2-40B4-BE49-F238E27FC236}">
+                <a16:creationId xmlns:a16="http://schemas.microsoft.com/office/drawing/2014/main" id="{AE0721A8-6F2E-284E-CF54-1FC73E6A5E4D}"/>
+              </a:ext>
+            </a:extLst>
+          </p:cNvPr>
+          <p:cNvSpPr>
+            <a:spLocks noGrp="1"/>
+          </p:cNvSpPr>
+          <p:nvPr>
+            <p:ph idx="1"/>
+          </p:nvPr>
+        </p:nvSpPr>
+        <p:spPr>
+          <a:xfrm>
+            <a:off x="1371600" y="1804086"/>
+            <a:ext cx="10120184" cy="4649300"/>
+          </a:xfrm>
+        </p:spPr>
+        <p:txBody>
+          <a:bodyPr>
+            <a:normAutofit/>
+          </a:bodyPr>
+          <a:lstStyle/>
+          <a:p>
+            <a:r>
+              <a:rPr lang="fr-FR" dirty="0"/>
+              <a:t>Formation : BUT Réseaux et Télécommunications </a:t>
+            </a:r>
+            <a:r>
+              <a:rPr lang="fr-FR" b="1" dirty="0"/>
+              <a:t>(R&amp;T)</a:t>
+            </a:r>
+          </a:p>
+          <a:p>
+            <a:r>
+              <a:rPr lang="fr-FR" dirty="0"/>
+              <a:t>Lieu : Institut Universitaire de Technologie (I.U.T.)</a:t>
+            </a:r>
+          </a:p>
+          <a:p>
+            <a:r>
+              <a:rPr lang="fr-FR" dirty="0"/>
+              <a:t>Durée : 3 ans pour 6 semestres</a:t>
+            </a:r>
+          </a:p>
+          <a:p>
+            <a:r>
+              <a:rPr lang="fr-FR" dirty="0"/>
+              <a:t>Effectif :</a:t>
+            </a:r>
+          </a:p>
+          <a:p>
+            <a:pPr lvl="1"/>
+            <a:r>
+              <a:rPr lang="fr-FR" dirty="0"/>
+              <a:t>Promotions de 84 élèves en 1</a:t>
+            </a:r>
+            <a:r>
+              <a:rPr lang="fr-FR" baseline="30000" dirty="0"/>
+              <a:t>ère  </a:t>
+            </a:r>
+            <a:r>
+              <a:rPr lang="fr-FR" dirty="0"/>
+              <a:t>année, 52 en 2</a:t>
+            </a:r>
+            <a:r>
+              <a:rPr lang="fr-FR" baseline="30000" dirty="0"/>
+              <a:t>nd</a:t>
+            </a:r>
+            <a:r>
+              <a:rPr lang="fr-FR" dirty="0"/>
+              <a:t> et 52 en 3</a:t>
+            </a:r>
+            <a:r>
+              <a:rPr lang="fr-FR" baseline="30000" dirty="0"/>
+              <a:t>ème</a:t>
+            </a:r>
+            <a:r>
+              <a:rPr lang="fr-FR" dirty="0"/>
+              <a:t> </a:t>
+            </a:r>
+          </a:p>
+          <a:p>
+            <a:pPr lvl="1"/>
+            <a:r>
+              <a:rPr lang="fr-FR" dirty="0" err="1"/>
+              <a:t>TDs</a:t>
+            </a:r>
+            <a:r>
+              <a:rPr lang="fr-FR" dirty="0"/>
+              <a:t> d’environ vingt étudiants</a:t>
+            </a:r>
+          </a:p>
+          <a:p>
+            <a:r>
+              <a:rPr lang="fr-FR" dirty="0"/>
+              <a:t>Formations d’origine :</a:t>
+            </a:r>
+          </a:p>
+          <a:p>
+            <a:pPr lvl="1"/>
+            <a:r>
+              <a:rPr lang="fr-FR" dirty="0"/>
+              <a:t>Bac général - 57 %</a:t>
+            </a:r>
+          </a:p>
+          <a:p>
+            <a:pPr lvl="1"/>
+            <a:r>
+              <a:rPr lang="fr-FR" dirty="0"/>
+              <a:t>Bac STI2D – 32 %</a:t>
+            </a:r>
+          </a:p>
+          <a:p>
+            <a:pPr lvl="1"/>
+            <a:r>
+              <a:rPr lang="fr-FR" dirty="0"/>
+              <a:t>Bac pro et autres – 11 %</a:t>
+            </a:r>
+          </a:p>
+          <a:p>
+            <a:r>
+              <a:rPr lang="fr-FR" dirty="0"/>
+              <a:t>Entre 10 et 20 % de réorientation</a:t>
+            </a:r>
+          </a:p>
+          <a:p>
+            <a:pPr lvl="1"/>
+            <a:endParaRPr lang="fr-FR" dirty="0"/>
+          </a:p>
+          <a:p>
+            <a:pPr lvl="1"/>
+            <a:endParaRPr lang="fr-FR" dirty="0"/>
+          </a:p>
+          <a:p>
+            <a:pPr lvl="1"/>
+            <a:endParaRPr lang="fr-FR" dirty="0"/>
+          </a:p>
+        </p:txBody>
+      </p:sp>
+      <p:sp>
+        <p:nvSpPr>
+          <p:cNvPr id="4" name="Espace réservé du numéro de diapositive 3">
+            <a:extLst>
+              <a:ext uri="{FF2B5EF4-FFF2-40B4-BE49-F238E27FC236}">
+                <a16:creationId xmlns:a16="http://schemas.microsoft.com/office/drawing/2014/main" id="{B36B938D-A947-8F9E-3CB3-B1A6CFA5DDAE}"/>
+              </a:ext>
+            </a:extLst>
+          </p:cNvPr>
+          <p:cNvSpPr>
+            <a:spLocks noGrp="1"/>
+          </p:cNvSpPr>
+          <p:nvPr>
+            <p:ph type="sldNum" sz="quarter" idx="12"/>
+          </p:nvPr>
+        </p:nvSpPr>
+        <p:spPr/>
+        <p:txBody>
+          <a:bodyPr/>
+          <a:lstStyle/>
+          <a:p>
+            <a:fld id="{CC057153-B650-4DEB-B370-79DDCFDCE934}" type="slidenum">
+              <a:rPr lang="en-US" smtClean="0"/>
+              <a:t>4</a:t>
+            </a:fld>
+            <a:endParaRPr lang="en-US" dirty="0"/>
+          </a:p>
+        </p:txBody>
+      </p:sp>
+    </p:spTree>
+    <p:extLst>
+      <p:ext uri="{BB962C8B-B14F-4D97-AF65-F5344CB8AC3E}">
+        <p14:creationId xmlns:p14="http://schemas.microsoft.com/office/powerpoint/2010/main" val="3467014899"/>
+      </p:ext>
+    </p:extLst>
+  </p:cSld>
+  <p:clrMapOvr>
+    <a:masterClrMapping/>
+  </p:clrMapOvr>
+</p:sld>
+</file>
+
+<file path=ppt/slides/slide5.xml><?xml version="1.0" encoding="utf-8"?>
+<p:sld xmlns:a="http://schemas.openxmlformats.org/drawingml/2006/main" xmlns:r="http://schemas.openxmlformats.org/officeDocument/2006/relationships" xmlns:p="http://schemas.openxmlformats.org/presentationml/2006/main">
+  <p:cSld>
+    <p:spTree>
+      <p:nvGrpSpPr>
+        <p:cNvPr id="1" name="">
+          <a:extLst>
+            <a:ext uri="{FF2B5EF4-FFF2-40B4-BE49-F238E27FC236}">
+              <a16:creationId xmlns:a16="http://schemas.microsoft.com/office/drawing/2014/main" id="{3601DB5A-BF3D-F30B-4F7B-B3416C7F9078}"/>
+            </a:ext>
+          </a:extLst>
+        </p:cNvPr>
+        <p:cNvGrpSpPr/>
+        <p:nvPr/>
+      </p:nvGrpSpPr>
+      <p:grpSpPr>
+        <a:xfrm>
+          <a:off x="0" y="0"/>
+          <a:ext cx="0" cy="0"/>
+          <a:chOff x="0" y="0"/>
+          <a:chExt cx="0" cy="0"/>
+        </a:xfrm>
+      </p:grpSpPr>
+      <p:sp>
+        <p:nvSpPr>
+          <p:cNvPr id="2" name="Titre 1">
+            <a:extLst>
+              <a:ext uri="{FF2B5EF4-FFF2-40B4-BE49-F238E27FC236}">
+                <a16:creationId xmlns:a16="http://schemas.microsoft.com/office/drawing/2014/main" id="{6B945171-CA31-E81F-F9DD-9C35AEBA9823}"/>
+              </a:ext>
+            </a:extLst>
+          </p:cNvPr>
+          <p:cNvSpPr>
+            <a:spLocks noGrp="1"/>
+          </p:cNvSpPr>
+          <p:nvPr>
+            <p:ph type="title"/>
+          </p:nvPr>
+        </p:nvSpPr>
+        <p:spPr/>
+        <p:txBody>
+          <a:bodyPr/>
+          <a:lstStyle/>
+          <a:p>
+            <a:r>
+              <a:rPr lang="fr-FR" dirty="0"/>
+              <a:t>Contexte</a:t>
+            </a:r>
+          </a:p>
+        </p:txBody>
+      </p:sp>
+      <p:sp>
+        <p:nvSpPr>
+          <p:cNvPr id="3" name="Espace réservé du contenu 2">
+            <a:extLst>
+              <a:ext uri="{FF2B5EF4-FFF2-40B4-BE49-F238E27FC236}">
+                <a16:creationId xmlns:a16="http://schemas.microsoft.com/office/drawing/2014/main" id="{A176B79E-EE47-2BCA-CBEF-6552C7345861}"/>
+              </a:ext>
+            </a:extLst>
+          </p:cNvPr>
+          <p:cNvSpPr>
+            <a:spLocks noGrp="1"/>
+          </p:cNvSpPr>
+          <p:nvPr>
+            <p:ph idx="1"/>
+          </p:nvPr>
+        </p:nvSpPr>
+        <p:spPr>
+          <a:xfrm>
+            <a:off x="1371600" y="1454906"/>
+            <a:ext cx="9601200" cy="4717294"/>
+          </a:xfrm>
+        </p:spPr>
+        <p:txBody>
+          <a:bodyPr>
+            <a:normAutofit/>
+          </a:bodyPr>
+          <a:lstStyle/>
+          <a:p>
+            <a:r>
+              <a:rPr lang="fr-FR" dirty="0"/>
+              <a:t>Objectif : Former des professionnels capables de :</a:t>
+            </a:r>
+          </a:p>
+          <a:p>
+            <a:pPr lvl="1"/>
+            <a:r>
+              <a:rPr lang="fr-FR" dirty="0"/>
+              <a:t>Comprendre, mettre en œuvre, configurer et maintenir des équipements et systèmes d’informations</a:t>
+            </a:r>
+          </a:p>
+          <a:p>
+            <a:pPr lvl="1"/>
+            <a:r>
+              <a:rPr lang="fr-FR" dirty="0"/>
+              <a:t>Assurer leur sécurité physique et logicielle</a:t>
+            </a:r>
+          </a:p>
+          <a:p>
+            <a:r>
+              <a:rPr lang="fr-FR" dirty="0"/>
+              <a:t>Formation professionnalisante :</a:t>
+            </a:r>
+          </a:p>
+          <a:p>
+            <a:pPr lvl="1"/>
+            <a:r>
+              <a:rPr lang="fr-FR" dirty="0"/>
+              <a:t>Possibilité de formation en alternance dès la deuxième année</a:t>
+            </a:r>
+          </a:p>
+          <a:p>
+            <a:pPr lvl="1"/>
+            <a:r>
+              <a:rPr lang="fr-FR" dirty="0"/>
+              <a:t>Stages en 2</a:t>
+            </a:r>
+            <a:r>
+              <a:rPr lang="fr-FR" baseline="30000" dirty="0"/>
+              <a:t>ème</a:t>
+            </a:r>
+            <a:r>
+              <a:rPr lang="fr-FR" dirty="0"/>
+              <a:t> et 3</a:t>
+            </a:r>
+            <a:r>
+              <a:rPr lang="fr-FR" baseline="30000" dirty="0"/>
+              <a:t>ème</a:t>
+            </a:r>
+            <a:r>
+              <a:rPr lang="fr-FR" dirty="0"/>
+              <a:t> année </a:t>
+            </a:r>
+          </a:p>
+          <a:p>
+            <a:r>
+              <a:rPr lang="fr-FR" dirty="0"/>
+              <a:t>Organisée autour de 5 grandes compétences :</a:t>
+            </a:r>
+          </a:p>
+          <a:p>
+            <a:endParaRPr lang="fr-FR" dirty="0"/>
+          </a:p>
+          <a:p>
+            <a:r>
+              <a:rPr lang="fr-FR" dirty="0"/>
+              <a:t>Socle commun et 5 spécialisations :</a:t>
+            </a:r>
+          </a:p>
+          <a:p>
+            <a:endParaRPr lang="fr-FR" dirty="0"/>
+          </a:p>
+          <a:p>
+            <a:pPr lvl="1"/>
+            <a:endParaRPr lang="fr-FR" dirty="0"/>
+          </a:p>
+        </p:txBody>
+      </p:sp>
+      <p:sp>
+        <p:nvSpPr>
+          <p:cNvPr id="4" name="Espace réservé du numéro de diapositive 3">
+            <a:extLst>
+              <a:ext uri="{FF2B5EF4-FFF2-40B4-BE49-F238E27FC236}">
+                <a16:creationId xmlns:a16="http://schemas.microsoft.com/office/drawing/2014/main" id="{EF1051F6-EB0C-3394-3B7C-6DA886BE12DB}"/>
+              </a:ext>
+            </a:extLst>
+          </p:cNvPr>
+          <p:cNvSpPr>
+            <a:spLocks noGrp="1"/>
+          </p:cNvSpPr>
+          <p:nvPr>
+            <p:ph type="sldNum" sz="quarter" idx="12"/>
+          </p:nvPr>
+        </p:nvSpPr>
+        <p:spPr/>
+        <p:txBody>
+          <a:bodyPr/>
+          <a:lstStyle/>
+          <a:p>
+            <a:fld id="{CC057153-B650-4DEB-B370-79DDCFDCE934}" type="slidenum">
+              <a:rPr lang="en-US" smtClean="0"/>
+              <a:t>5</a:t>
+            </a:fld>
+            <a:endParaRPr lang="en-US"/>
+          </a:p>
+        </p:txBody>
+      </p:sp>
+      <p:graphicFrame>
+        <p:nvGraphicFramePr>
+          <p:cNvPr id="9" name="Tableau 8">
+            <a:extLst>
+              <a:ext uri="{FF2B5EF4-FFF2-40B4-BE49-F238E27FC236}">
+                <a16:creationId xmlns:a16="http://schemas.microsoft.com/office/drawing/2014/main" id="{7A3DADAA-834B-EBB5-A906-B661752D8549}"/>
+              </a:ext>
+            </a:extLst>
+          </p:cNvPr>
+          <p:cNvGraphicFramePr>
+            <a:graphicFrameLocks noGrp="1"/>
+          </p:cNvGraphicFramePr>
+          <p:nvPr/>
+        </p:nvGraphicFramePr>
+        <p:xfrm>
+          <a:off x="2304549" y="4594619"/>
+          <a:ext cx="8128000" cy="365760"/>
+        </p:xfrm>
+        <a:graphic>
+          <a:graphicData uri="http://schemas.openxmlformats.org/drawingml/2006/table">
+            <a:tbl>
+              <a:tblPr firstRow="1" bandRow="1">
+                <a:tableStyleId>{5C22544A-7EE6-4342-B048-85BDC9FD1C3A}</a:tableStyleId>
+              </a:tblPr>
+              <a:tblGrid>
+                <a:gridCol w="1625600">
+                  <a:extLst>
+                    <a:ext uri="{9D8B030D-6E8A-4147-A177-3AD203B41FA5}">
+                      <a16:colId xmlns:a16="http://schemas.microsoft.com/office/drawing/2014/main" val="1150626277"/>
+                    </a:ext>
+                  </a:extLst>
+                </a:gridCol>
+                <a:gridCol w="1625600">
+                  <a:extLst>
+                    <a:ext uri="{9D8B030D-6E8A-4147-A177-3AD203B41FA5}">
+                      <a16:colId xmlns:a16="http://schemas.microsoft.com/office/drawing/2014/main" val="3387947173"/>
+                    </a:ext>
+                  </a:extLst>
+                </a:gridCol>
+                <a:gridCol w="1625600">
+                  <a:extLst>
+                    <a:ext uri="{9D8B030D-6E8A-4147-A177-3AD203B41FA5}">
+                      <a16:colId xmlns:a16="http://schemas.microsoft.com/office/drawing/2014/main" val="3975716277"/>
+                    </a:ext>
+                  </a:extLst>
+                </a:gridCol>
+                <a:gridCol w="1625600">
+                  <a:extLst>
+                    <a:ext uri="{9D8B030D-6E8A-4147-A177-3AD203B41FA5}">
+                      <a16:colId xmlns:a16="http://schemas.microsoft.com/office/drawing/2014/main" val="1448859518"/>
+                    </a:ext>
+                  </a:extLst>
+                </a:gridCol>
+                <a:gridCol w="1625600">
+                  <a:extLst>
+                    <a:ext uri="{9D8B030D-6E8A-4147-A177-3AD203B41FA5}">
+                      <a16:colId xmlns:a16="http://schemas.microsoft.com/office/drawing/2014/main" val="46267013"/>
+                    </a:ext>
+                  </a:extLst>
+                </a:gridCol>
+              </a:tblGrid>
+              <a:tr h="241095">
+                <a:tc>
+                  <a:txBody>
+                    <a:bodyPr/>
+                    <a:lstStyle/>
+                    <a:p>
+                      <a:pPr algn="ctr"/>
+                      <a:r>
+                        <a:rPr lang="fr-FR" dirty="0"/>
+                        <a:t>Administrer</a:t>
+                      </a:r>
+                    </a:p>
+                  </a:txBody>
+                  <a:tcPr/>
+                </a:tc>
+                <a:tc>
+                  <a:txBody>
+                    <a:bodyPr/>
+                    <a:lstStyle/>
+                    <a:p>
+                      <a:pPr algn="ctr"/>
+                      <a:r>
+                        <a:rPr lang="fr-FR" dirty="0"/>
+                        <a:t>Connecter</a:t>
+                      </a:r>
+                    </a:p>
+                  </a:txBody>
+                  <a:tcPr/>
+                </a:tc>
+                <a:tc>
+                  <a:txBody>
+                    <a:bodyPr/>
+                    <a:lstStyle/>
+                    <a:p>
+                      <a:pPr algn="ctr"/>
+                      <a:r>
+                        <a:rPr lang="fr-FR" dirty="0"/>
+                        <a:t>Programmer</a:t>
+                      </a:r>
+                    </a:p>
+                  </a:txBody>
+                  <a:tcPr/>
+                </a:tc>
+                <a:tc>
+                  <a:txBody>
+                    <a:bodyPr/>
+                    <a:lstStyle/>
+                    <a:p>
+                      <a:pPr algn="ctr"/>
+                      <a:r>
+                        <a:rPr lang="fr-FR" dirty="0"/>
+                        <a:t>Orchestrer</a:t>
+                      </a:r>
+                    </a:p>
+                  </a:txBody>
+                  <a:tcPr/>
+                </a:tc>
+                <a:tc>
+                  <a:txBody>
+                    <a:bodyPr/>
+                    <a:lstStyle/>
+                    <a:p>
+                      <a:pPr algn="ctr"/>
+                      <a:r>
+                        <a:rPr lang="fr-FR" dirty="0"/>
+                        <a:t>Développer</a:t>
+                      </a:r>
+                    </a:p>
+                  </a:txBody>
+                  <a:tcPr/>
+                </a:tc>
+                <a:extLst>
+                  <a:ext uri="{0D108BD9-81ED-4DB2-BD59-A6C34878D82A}">
+                    <a16:rowId xmlns:a16="http://schemas.microsoft.com/office/drawing/2014/main" val="3424467210"/>
+                  </a:ext>
+                </a:extLst>
+              </a:tr>
+            </a:tbl>
+          </a:graphicData>
+        </a:graphic>
+      </p:graphicFrame>
+      <p:graphicFrame>
+        <p:nvGraphicFramePr>
+          <p:cNvPr id="5" name="Tableau 4">
+            <a:extLst>
+              <a:ext uri="{FF2B5EF4-FFF2-40B4-BE49-F238E27FC236}">
+                <a16:creationId xmlns:a16="http://schemas.microsoft.com/office/drawing/2014/main" id="{15595447-CD84-0569-B9D4-84E099698994}"/>
+              </a:ext>
+            </a:extLst>
+          </p:cNvPr>
+          <p:cNvGraphicFramePr>
+            <a:graphicFrameLocks noGrp="1"/>
+          </p:cNvGraphicFramePr>
+          <p:nvPr/>
+        </p:nvGraphicFramePr>
+        <p:xfrm>
+          <a:off x="1739900" y="5446975"/>
+          <a:ext cx="9398000" cy="865818"/>
+        </p:xfrm>
+        <a:graphic>
+          <a:graphicData uri="http://schemas.openxmlformats.org/drawingml/2006/table">
+            <a:tbl>
+              <a:tblPr firstRow="1" bandRow="1">
+                <a:tableStyleId>{5C22544A-7EE6-4342-B048-85BDC9FD1C3A}</a:tableStyleId>
+              </a:tblPr>
+              <a:tblGrid>
+                <a:gridCol w="1879600">
+                  <a:extLst>
+                    <a:ext uri="{9D8B030D-6E8A-4147-A177-3AD203B41FA5}">
+                      <a16:colId xmlns:a16="http://schemas.microsoft.com/office/drawing/2014/main" val="3412871728"/>
+                    </a:ext>
+                  </a:extLst>
+                </a:gridCol>
+                <a:gridCol w="1879600">
+                  <a:extLst>
+                    <a:ext uri="{9D8B030D-6E8A-4147-A177-3AD203B41FA5}">
+                      <a16:colId xmlns:a16="http://schemas.microsoft.com/office/drawing/2014/main" val="345503316"/>
+                    </a:ext>
+                  </a:extLst>
+                </a:gridCol>
+                <a:gridCol w="1879600">
+                  <a:extLst>
+                    <a:ext uri="{9D8B030D-6E8A-4147-A177-3AD203B41FA5}">
+                      <a16:colId xmlns:a16="http://schemas.microsoft.com/office/drawing/2014/main" val="219198854"/>
+                    </a:ext>
+                  </a:extLst>
+                </a:gridCol>
+                <a:gridCol w="1879600">
+                  <a:extLst>
+                    <a:ext uri="{9D8B030D-6E8A-4147-A177-3AD203B41FA5}">
+                      <a16:colId xmlns:a16="http://schemas.microsoft.com/office/drawing/2014/main" val="3745286079"/>
+                    </a:ext>
+                  </a:extLst>
+                </a:gridCol>
+                <a:gridCol w="1879600">
+                  <a:extLst>
+                    <a:ext uri="{9D8B030D-6E8A-4147-A177-3AD203B41FA5}">
+                      <a16:colId xmlns:a16="http://schemas.microsoft.com/office/drawing/2014/main" val="1691305449"/>
+                    </a:ext>
+                  </a:extLst>
+                </a:gridCol>
+              </a:tblGrid>
+              <a:tr h="236279">
+                <a:tc gridSpan="5">
+                  <a:txBody>
+                    <a:bodyPr/>
+                    <a:lstStyle/>
+                    <a:p>
+                      <a:pPr algn="ctr"/>
+                      <a:r>
+                        <a:rPr lang="fr-FR" sz="1400" dirty="0"/>
+                        <a:t>Socle commun en première année</a:t>
+                      </a:r>
+                    </a:p>
+                  </a:txBody>
+                  <a:tcPr/>
+                </a:tc>
+                <a:tc hMerge="1">
+                  <a:txBody>
+                    <a:bodyPr/>
+                    <a:lstStyle/>
+                    <a:p>
+                      <a:endParaRPr lang="fr-FR" dirty="0"/>
+                    </a:p>
+                  </a:txBody>
+                  <a:tcPr/>
+                </a:tc>
+                <a:tc hMerge="1">
+                  <a:txBody>
+                    <a:bodyPr/>
+                    <a:lstStyle/>
+                    <a:p>
+                      <a:endParaRPr lang="fr-FR" dirty="0"/>
+                    </a:p>
+                  </a:txBody>
+                  <a:tcPr/>
+                </a:tc>
+                <a:tc hMerge="1">
+                  <a:txBody>
+                    <a:bodyPr/>
+                    <a:lstStyle/>
+                    <a:p>
+                      <a:endParaRPr lang="fr-FR" dirty="0"/>
+                    </a:p>
+                  </a:txBody>
+                  <a:tcPr/>
+                </a:tc>
+                <a:tc hMerge="1">
+                  <a:txBody>
+                    <a:bodyPr/>
+                    <a:lstStyle/>
+                    <a:p>
+                      <a:endParaRPr lang="fr-FR" dirty="0"/>
+                    </a:p>
+                  </a:txBody>
+                  <a:tcPr/>
+                </a:tc>
+                <a:extLst>
+                  <a:ext uri="{0D108BD9-81ED-4DB2-BD59-A6C34878D82A}">
+                    <a16:rowId xmlns:a16="http://schemas.microsoft.com/office/drawing/2014/main" val="2803446210"/>
+                  </a:ext>
+                </a:extLst>
+              </a:tr>
+              <a:tr h="561018">
+                <a:tc>
+                  <a:txBody>
+                    <a:bodyPr/>
+                    <a:lstStyle/>
+                    <a:p>
+                      <a:pPr algn="ctr"/>
+                      <a:r>
+                        <a:rPr lang="fr-FR" sz="1400" dirty="0"/>
+                        <a:t>Cybersécurité</a:t>
+                      </a:r>
+                    </a:p>
+                  </a:txBody>
+                  <a:tcPr/>
+                </a:tc>
+                <a:tc>
+                  <a:txBody>
+                    <a:bodyPr/>
+                    <a:lstStyle/>
+                    <a:p>
+                      <a:pPr algn="ctr"/>
+                      <a:r>
+                        <a:rPr lang="fr-FR" sz="1400" dirty="0"/>
+                        <a:t>Développement système et cloud</a:t>
+                      </a:r>
+                    </a:p>
+                  </a:txBody>
+                  <a:tcPr/>
+                </a:tc>
+                <a:tc>
+                  <a:txBody>
+                    <a:bodyPr/>
+                    <a:lstStyle/>
+                    <a:p>
+                      <a:pPr algn="ctr"/>
+                      <a:r>
+                        <a:rPr lang="fr-FR" sz="1400" dirty="0"/>
+                        <a:t>Internet des objets et mobilité</a:t>
+                      </a:r>
+                    </a:p>
+                  </a:txBody>
+                  <a:tcPr/>
+                </a:tc>
+                <a:tc>
+                  <a:txBody>
+                    <a:bodyPr/>
+                    <a:lstStyle/>
+                    <a:p>
+                      <a:pPr algn="ctr"/>
+                      <a:r>
+                        <a:rPr lang="fr-FR" sz="1400" dirty="0"/>
+                        <a:t>Pilotage de projets réseaux</a:t>
+                      </a:r>
+                    </a:p>
+                  </a:txBody>
+                  <a:tcPr/>
+                </a:tc>
+                <a:tc>
+                  <a:txBody>
+                    <a:bodyPr/>
+                    <a:lstStyle/>
+                    <a:p>
+                      <a:pPr algn="ctr"/>
+                      <a:r>
+                        <a:rPr lang="fr-FR" sz="1400" dirty="0"/>
+                        <a:t>Réseaux opérateurs et multimédia</a:t>
+                      </a:r>
+                    </a:p>
+                  </a:txBody>
+                  <a:tcPr/>
+                </a:tc>
+                <a:extLst>
+                  <a:ext uri="{0D108BD9-81ED-4DB2-BD59-A6C34878D82A}">
+                    <a16:rowId xmlns:a16="http://schemas.microsoft.com/office/drawing/2014/main" val="1867267048"/>
+                  </a:ext>
+                </a:extLst>
+              </a:tr>
+            </a:tbl>
+          </a:graphicData>
+        </a:graphic>
+      </p:graphicFrame>
+    </p:spTree>
+    <p:extLst>
+      <p:ext uri="{BB962C8B-B14F-4D97-AF65-F5344CB8AC3E}">
+        <p14:creationId xmlns:p14="http://schemas.microsoft.com/office/powerpoint/2010/main" val="1272440417"/>
+      </p:ext>
+    </p:extLst>
+  </p:cSld>
+  <p:clrMapOvr>
+    <a:masterClrMapping/>
+  </p:clrMapOvr>
+</p:sld>
+</file>
+
+<file path=ppt/slides/slide6.xml><?xml version="1.0" encoding="utf-8"?>
+<p:sld xmlns:a="http://schemas.openxmlformats.org/drawingml/2006/main" xmlns:r="http://schemas.openxmlformats.org/officeDocument/2006/relationships" xmlns:p="http://schemas.openxmlformats.org/presentationml/2006/main">
+  <p:cSld>
+    <p:spTree>
+      <p:nvGrpSpPr>
+        <p:cNvPr id="1" name="">
+          <a:extLst>
+            <a:ext uri="{FF2B5EF4-FFF2-40B4-BE49-F238E27FC236}">
+              <a16:creationId xmlns:a16="http://schemas.microsoft.com/office/drawing/2014/main" id="{484B9825-6D00-DAF9-8F24-CE9C0F9F57CD}"/>
+            </a:ext>
+          </a:extLst>
+        </p:cNvPr>
+        <p:cNvGrpSpPr/>
+        <p:nvPr/>
+      </p:nvGrpSpPr>
+      <p:grpSpPr>
+        <a:xfrm>
+          <a:off x="0" y="0"/>
+          <a:ext cx="0" cy="0"/>
+          <a:chOff x="0" y="0"/>
+          <a:chExt cx="0" cy="0"/>
+        </a:xfrm>
+      </p:grpSpPr>
+      <p:sp>
+        <p:nvSpPr>
+          <p:cNvPr id="2" name="Titre 1">
+            <a:extLst>
+              <a:ext uri="{FF2B5EF4-FFF2-40B4-BE49-F238E27FC236}">
+                <a16:creationId xmlns:a16="http://schemas.microsoft.com/office/drawing/2014/main" id="{13B450CC-DA82-3AE7-1E7D-F2EDFA5F8220}"/>
+              </a:ext>
+            </a:extLst>
+          </p:cNvPr>
+          <p:cNvSpPr>
+            <a:spLocks noGrp="1"/>
+          </p:cNvSpPr>
+          <p:nvPr>
+            <p:ph type="title"/>
+          </p:nvPr>
+        </p:nvSpPr>
+        <p:spPr/>
+        <p:txBody>
+          <a:bodyPr/>
+          <a:lstStyle/>
+          <a:p>
+            <a:r>
+              <a:rPr lang="fr-FR" dirty="0"/>
+              <a:t>Démarches pédagogiques</a:t>
+            </a:r>
+          </a:p>
+        </p:txBody>
+      </p:sp>
+      <p:sp>
+        <p:nvSpPr>
+          <p:cNvPr id="4" name="Espace réservé du numéro de diapositive 3">
+            <a:extLst>
+              <a:ext uri="{FF2B5EF4-FFF2-40B4-BE49-F238E27FC236}">
+                <a16:creationId xmlns:a16="http://schemas.microsoft.com/office/drawing/2014/main" id="{FAEF967B-0132-E54A-B6FE-5DB3F68A6D42}"/>
+              </a:ext>
+            </a:extLst>
+          </p:cNvPr>
+          <p:cNvSpPr>
+            <a:spLocks noGrp="1"/>
+          </p:cNvSpPr>
+          <p:nvPr>
+            <p:ph type="sldNum" sz="quarter" idx="12"/>
+          </p:nvPr>
+        </p:nvSpPr>
+        <p:spPr/>
+        <p:txBody>
+          <a:bodyPr/>
+          <a:lstStyle/>
+          <a:p>
+            <a:fld id="{CC057153-B650-4DEB-B370-79DDCFDCE934}" type="slidenum">
+              <a:rPr lang="en-US" smtClean="0"/>
+              <a:t>6</a:t>
+            </a:fld>
+            <a:endParaRPr lang="en-US"/>
+          </a:p>
+        </p:txBody>
+      </p:sp>
+      <p:sp>
+        <p:nvSpPr>
+          <p:cNvPr id="6" name="Espace réservé du contenu 5">
+            <a:extLst>
+              <a:ext uri="{FF2B5EF4-FFF2-40B4-BE49-F238E27FC236}">
+                <a16:creationId xmlns:a16="http://schemas.microsoft.com/office/drawing/2014/main" id="{9E16BAED-1453-9320-767E-0D4CAB67B7A7}"/>
+              </a:ext>
+            </a:extLst>
+          </p:cNvPr>
+          <p:cNvSpPr>
+            <a:spLocks noGrp="1"/>
+          </p:cNvSpPr>
+          <p:nvPr>
+            <p:ph idx="1"/>
+          </p:nvPr>
+        </p:nvSpPr>
+        <p:spPr>
+          <a:xfrm>
+            <a:off x="1467827" y="2009002"/>
+            <a:ext cx="10308161" cy="3934597"/>
+          </a:xfrm>
+        </p:spPr>
+        <p:txBody>
+          <a:bodyPr/>
+          <a:lstStyle/>
+          <a:p>
+            <a:r>
+              <a:rPr lang="fr-FR" dirty="0"/>
+              <a:t>Les situations d’apprentissage et d’évaluation (</a:t>
+            </a:r>
+            <a:r>
+              <a:rPr lang="fr-FR" b="1" dirty="0"/>
+              <a:t>SAÉ</a:t>
+            </a:r>
+            <a:r>
+              <a:rPr lang="fr-FR" dirty="0"/>
+              <a:t>)</a:t>
+            </a:r>
+          </a:p>
+          <a:p>
+            <a:pPr lvl="1"/>
+            <a:r>
+              <a:rPr lang="fr-FR" dirty="0"/>
+              <a:t>Tâches authentiques inspirées de problématiques émanant du milieu professionnel</a:t>
+            </a:r>
+          </a:p>
+          <a:p>
+            <a:pPr lvl="1"/>
+            <a:r>
+              <a:rPr lang="fr-FR" dirty="0"/>
+              <a:t>Participe au développement de la compétence et à l’apprentissage des ressources</a:t>
+            </a:r>
+          </a:p>
+          <a:p>
+            <a:r>
+              <a:rPr lang="fr-FR" dirty="0"/>
+              <a:t>Le portfolio</a:t>
+            </a:r>
+          </a:p>
+          <a:p>
+            <a:pPr lvl="1"/>
+            <a:r>
+              <a:rPr lang="fr-FR" dirty="0"/>
+              <a:t>Point de connexion entre le monde universitaire et le monde socio-économique</a:t>
+            </a:r>
+          </a:p>
+          <a:p>
+            <a:pPr lvl="1"/>
+            <a:r>
+              <a:rPr lang="fr-FR" dirty="0"/>
+              <a:t>Preuves issues de l’ensemble de ses </a:t>
+            </a:r>
+            <a:r>
+              <a:rPr lang="fr-FR" dirty="0" err="1"/>
+              <a:t>SAÉs</a:t>
+            </a:r>
+            <a:endParaRPr lang="fr-FR" dirty="0"/>
+          </a:p>
+          <a:p>
+            <a:r>
+              <a:rPr lang="fr-FR" dirty="0"/>
+              <a:t>Le Projet Personnel et Professionnel (PPP)</a:t>
+            </a:r>
+          </a:p>
+          <a:p>
+            <a:pPr lvl="1"/>
+            <a:r>
+              <a:rPr lang="fr-FR" dirty="0"/>
+              <a:t>Accompagnement de l’étudiant dans la construction de son identité professionnelle</a:t>
+            </a:r>
+          </a:p>
+          <a:p>
+            <a:pPr lvl="1"/>
+            <a:r>
+              <a:rPr lang="fr-FR" dirty="0"/>
+              <a:t>Aider l’étudiant à se définir et à se positionner</a:t>
+            </a:r>
+          </a:p>
+          <a:p>
+            <a:pPr lvl="1"/>
+            <a:endParaRPr lang="fr-FR" dirty="0"/>
+          </a:p>
+        </p:txBody>
+      </p:sp>
+    </p:spTree>
+    <p:extLst>
+      <p:ext uri="{BB962C8B-B14F-4D97-AF65-F5344CB8AC3E}">
+        <p14:creationId xmlns:p14="http://schemas.microsoft.com/office/powerpoint/2010/main" val="3443355237"/>
       </p:ext>
     </p:extLst>
   </p:cSld>
